--- a/media/resources/files/Onduktar_Koboytuu_Boluu_JoopTorchosu.pptx
+++ b/media/resources/files/Onduktar_Koboytuu_Boluu_JoopTorchosu.pptx
@@ -23398,7 +23398,7 @@
             </a:pPr>
             <a:r>
               <a:rPr lang="ru-RU" sz="2400" dirty="0"/>
-              <a:t>Турдуу пикирлер учун ыраазычылык билдиребиз.</a:t>
+              <a:t>Түрдүү пикирлер үчүн ыраазычылык билдиребиз.</a:t>
             </a:r>
           </a:p>
           <a:p>

--- a/media/resources/files/Onduktar_Koboytuu_Boluu_JoopTorchosu.pptx
+++ b/media/resources/files/Onduktar_Koboytuu_Boluu_JoopTorchosu.pptx
@@ -7578,7 +7578,7 @@
                           <a:ea typeface="+mn-ea"/>
                           <a:cs typeface="+mn-cs"/>
                         </a:rPr>
-                        <a:t>1.76</a:t>
+                        <a:t>1,76</a:t>
                       </a:r>
                     </a:p>
                   </a:txBody>
@@ -7661,7 +7661,7 @@
                           <a:ea typeface="+mn-ea"/>
                           <a:cs typeface="+mn-cs"/>
                         </a:rPr>
-                        <a:t>0.5</a:t>
+                        <a:t>0,5</a:t>
                       </a:r>
                     </a:p>
                   </a:txBody>
@@ -7827,7 +7827,7 @@
                           <a:ea typeface="+mn-ea"/>
                           <a:cs typeface="+mn-cs"/>
                         </a:rPr>
-                        <a:t>0.3</a:t>
+                        <a:t>0,3</a:t>
                       </a:r>
                     </a:p>
                   </a:txBody>
@@ -7910,7 +7910,7 @@
                           <a:ea typeface="+mn-ea"/>
                           <a:cs typeface="+mn-cs"/>
                         </a:rPr>
-                        <a:t>0.6</a:t>
+                        <a:t>0,6</a:t>
                       </a:r>
                     </a:p>
                   </a:txBody>
@@ -8083,7 +8083,7 @@
                           <a:ea typeface="+mn-ea"/>
                           <a:cs typeface="+mn-cs"/>
                         </a:rPr>
-                        <a:t>3.72</a:t>
+                        <a:t>3,72</a:t>
                       </a:r>
                     </a:p>
                   </a:txBody>
@@ -8166,7 +8166,7 @@
                           <a:ea typeface="+mn-ea"/>
                           <a:cs typeface="+mn-cs"/>
                         </a:rPr>
-                        <a:t>2.1</a:t>
+                        <a:t>2,1</a:t>
                       </a:r>
                     </a:p>
                   </a:txBody>
@@ -8249,7 +8249,7 @@
                           <a:ea typeface="+mn-ea"/>
                           <a:cs typeface="+mn-cs"/>
                         </a:rPr>
-                        <a:t>1.5</a:t>
+                        <a:t>1,5</a:t>
                       </a:r>
                     </a:p>
                   </a:txBody>
@@ -8422,7 +8422,7 @@
                           <a:ea typeface="+mn-ea"/>
                           <a:cs typeface="+mn-cs"/>
                         </a:rPr>
-                        <a:t>0.8</a:t>
+                        <a:t>0,8</a:t>
                       </a:r>
                     </a:p>
                   </a:txBody>
@@ -8505,7 +8505,7 @@
                           <a:ea typeface="+mn-ea"/>
                           <a:cs typeface="+mn-cs"/>
                         </a:rPr>
-                        <a:t>0.1</a:t>
+                        <a:t>0,1</a:t>
                       </a:r>
                     </a:p>
                   </a:txBody>
@@ -8588,7 +8588,7 @@
                           <a:ea typeface="+mn-ea"/>
                           <a:cs typeface="+mn-cs"/>
                         </a:rPr>
-                        <a:t>0.7</a:t>
+                        <a:t>0,7</a:t>
                       </a:r>
                     </a:p>
                   </a:txBody>
@@ -8671,7 +8671,7 @@
                           <a:ea typeface="+mn-ea"/>
                           <a:cs typeface="+mn-cs"/>
                         </a:rPr>
-                        <a:t>12.4</a:t>
+                        <a:t>12,4</a:t>
                       </a:r>
                     </a:p>
                   </a:txBody>
@@ -8754,7 +8754,7 @@
                           <a:ea typeface="+mn-ea"/>
                           <a:cs typeface="+mn-cs"/>
                         </a:rPr>
-                        <a:t>7.4</a:t>
+                        <a:t>7,4</a:t>
                       </a:r>
                     </a:p>
                   </a:txBody>
@@ -8927,7 +8927,7 @@
                           <a:ea typeface="+mn-ea"/>
                           <a:cs typeface="+mn-cs"/>
                         </a:rPr>
-                        <a:t>1.3</a:t>
+                        <a:t>1,3</a:t>
                       </a:r>
                     </a:p>
                   </a:txBody>
@@ -9093,7 +9093,7 @@
                           <a:ea typeface="+mn-ea"/>
                           <a:cs typeface="+mn-cs"/>
                         </a:rPr>
-                        <a:t>3.6</a:t>
+                        <a:t>3,6</a:t>
                       </a:r>
                     </a:p>
                   </a:txBody>
@@ -9266,7 +9266,7 @@
                           <a:ea typeface="+mn-ea"/>
                           <a:cs typeface="+mn-cs"/>
                         </a:rPr>
-                        <a:t>6.3</a:t>
+                        <a:t>6,3</a:t>
                       </a:r>
                     </a:p>
                   </a:txBody>
@@ -9349,7 +9349,7 @@
                           <a:ea typeface="+mn-ea"/>
                           <a:cs typeface="+mn-cs"/>
                         </a:rPr>
-                        <a:t>1.75</a:t>
+                        <a:t>1,75</a:t>
                       </a:r>
                     </a:p>
                   </a:txBody>
@@ -9432,7 +9432,7 @@
                           <a:ea typeface="+mn-ea"/>
                           <a:cs typeface="+mn-cs"/>
                         </a:rPr>
-                        <a:t>9.12</a:t>
+                        <a:t>9,12</a:t>
                       </a:r>
                     </a:p>
                   </a:txBody>
@@ -9515,7 +9515,7 @@
                           <a:ea typeface="+mn-ea"/>
                           <a:cs typeface="+mn-cs"/>
                         </a:rPr>
-                        <a:t>2.5</a:t>
+                        <a:t>2,5</a:t>
                       </a:r>
                     </a:p>
                   </a:txBody>
@@ -9598,7 +9598,7 @@
                           <a:ea typeface="+mn-ea"/>
                           <a:cs typeface="+mn-cs"/>
                         </a:rPr>
-                        <a:t>0.98</a:t>
+                        <a:t>0,98</a:t>
                       </a:r>
                     </a:p>
                   </a:txBody>
@@ -9729,7 +9729,7 @@
                           </a:solidFill>
                           <a:latin typeface="Bahnschrift" panose="020B0502040204020203" pitchFamily="34" charset="0"/>
                         </a:rPr>
-                        <a:t>1.2 × 3.1</a:t>
+                        <a:t>1,2 × 3,1</a:t>
                       </a:r>
                     </a:p>
                   </a:txBody>
@@ -9796,7 +9796,7 @@
                           </a:solidFill>
                           <a:latin typeface="Bahnschrift" panose="020B0502040204020203" pitchFamily="34" charset="0"/>
                         </a:rPr>
-                        <a:t> 6.5 ÷ 5</a:t>
+                        <a:t> 6,5 ÷ 5</a:t>
                       </a:r>
                     </a:p>
                   </a:txBody>
@@ -9863,7 +9863,7 @@
                           </a:solidFill>
                           <a:latin typeface="Bahnschrift" panose="020B0502040204020203" pitchFamily="34" charset="0"/>
                         </a:rPr>
-                        <a:t>4 × 0.9</a:t>
+                        <a:t>4 × 0,9</a:t>
                       </a:r>
                     </a:p>
                   </a:txBody>
@@ -9930,7 +9930,7 @@
                           </a:solidFill>
                           <a:latin typeface="Bahnschrift" panose="020B0502040204020203" pitchFamily="34" charset="0"/>
                         </a:rPr>
-                        <a:t>4 ÷ 0.4</a:t>
+                        <a:t>4 ÷ 0,4</a:t>
                       </a:r>
                     </a:p>
                   </a:txBody>
@@ -9997,7 +9997,7 @@
                           </a:solidFill>
                           <a:latin typeface="Bahnschrift" panose="020B0502040204020203" pitchFamily="34" charset="0"/>
                         </a:rPr>
-                        <a:t>3 × 2.1</a:t>
+                        <a:t>3 × 2,1</a:t>
                       </a:r>
                     </a:p>
                   </a:txBody>
@@ -10071,7 +10071,7 @@
                           </a:solidFill>
                           <a:latin typeface="Bahnschrift" panose="020B0502040204020203" pitchFamily="34" charset="0"/>
                         </a:rPr>
-                        <a:t>2.4 ÷ 1.2</a:t>
+                        <a:t>2,4 ÷ 1,2</a:t>
                       </a:r>
                     </a:p>
                   </a:txBody>
@@ -10138,7 +10138,7 @@
                           </a:solidFill>
                           <a:latin typeface="Bahnschrift" panose="020B0502040204020203" pitchFamily="34" charset="0"/>
                         </a:rPr>
-                        <a:t>0.6 × 0.5</a:t>
+                        <a:t>0,6 × 0,5</a:t>
                       </a:r>
                     </a:p>
                   </a:txBody>
@@ -10205,7 +10205,7 @@
                           </a:solidFill>
                           <a:latin typeface="Bahnschrift" panose="020B0502040204020203" pitchFamily="34" charset="0"/>
                         </a:rPr>
-                        <a:t>0. 9 ÷ 1.5</a:t>
+                        <a:t>0. 9 ÷ 1,5</a:t>
                       </a:r>
                     </a:p>
                   </a:txBody>
@@ -10272,7 +10272,7 @@
                           </a:solidFill>
                           <a:latin typeface="Bahnschrift" panose="020B0502040204020203" pitchFamily="34" charset="0"/>
                         </a:rPr>
-                        <a:t>3.7 × 2</a:t>
+                        <a:t>3,7 × 2</a:t>
                       </a:r>
                     </a:p>
                   </a:txBody>
@@ -10339,7 +10339,7 @@
                           </a:solidFill>
                           <a:latin typeface="Bahnschrift" panose="020B0502040204020203" pitchFamily="34" charset="0"/>
                         </a:rPr>
-                        <a:t>2.8 ÷ 1.6</a:t>
+                        <a:t>2,8 ÷ 1,6</a:t>
                       </a:r>
                     </a:p>
                   </a:txBody>
@@ -10413,7 +10413,7 @@
                           </a:solidFill>
                           <a:latin typeface="Bahnschrift" panose="020B0502040204020203" pitchFamily="34" charset="0"/>
                         </a:rPr>
-                        <a:t>3. 8 × 2.4</a:t>
+                        <a:t>3. 8 × 2,4</a:t>
                       </a:r>
                     </a:p>
                   </a:txBody>
@@ -10480,7 +10480,7 @@
                           </a:solidFill>
                           <a:latin typeface="Bahnschrift" panose="020B0502040204020203" pitchFamily="34" charset="0"/>
                         </a:rPr>
-                        <a:t>2.8 ÷ 4</a:t>
+                        <a:t>2,8 ÷ 4</a:t>
                       </a:r>
                     </a:p>
                   </a:txBody>
@@ -10547,7 +10547,7 @@
                           </a:solidFill>
                           <a:latin typeface="Bahnschrift" panose="020B0502040204020203" pitchFamily="34" charset="0"/>
                         </a:rPr>
-                        <a:t> 1.1 × 1.6</a:t>
+                        <a:t> 1,1 × 1,6</a:t>
                       </a:r>
                     </a:p>
                   </a:txBody>
@@ -10614,7 +10614,7 @@
                           </a:solidFill>
                           <a:latin typeface="Bahnschrift" panose="020B0502040204020203" pitchFamily="34" charset="0"/>
                         </a:rPr>
-                        <a:t>5 ÷ 0.2</a:t>
+                        <a:t>5 ÷ 0,2</a:t>
                       </a:r>
                     </a:p>
                   </a:txBody>
@@ -10681,7 +10681,7 @@
                           </a:solidFill>
                           <a:latin typeface="Bahnschrift" panose="020B0502040204020203" pitchFamily="34" charset="0"/>
                         </a:rPr>
-                        <a:t>0.5 × 0.2</a:t>
+                        <a:t>0,5 × 0,2</a:t>
                       </a:r>
                     </a:p>
                   </a:txBody>
@@ -10755,7 +10755,7 @@
                           </a:solidFill>
                           <a:latin typeface="Bahnschrift" panose="020B0502040204020203" pitchFamily="34" charset="0"/>
                         </a:rPr>
-                        <a:t>7.2 ÷ 9</a:t>
+                        <a:t>7,2 ÷ 9</a:t>
                       </a:r>
                     </a:p>
                   </a:txBody>
@@ -10822,7 +10822,7 @@
                           </a:solidFill>
                           <a:latin typeface="Bahnschrift" panose="020B0502040204020203" pitchFamily="34" charset="0"/>
                         </a:rPr>
-                        <a:t>3.1 × 4</a:t>
+                        <a:t>3,1 × 4</a:t>
                       </a:r>
                     </a:p>
                   </a:txBody>
@@ -10889,7 +10889,7 @@
                           </a:solidFill>
                           <a:latin typeface="Bahnschrift" panose="020B0502040204020203" pitchFamily="34" charset="0"/>
                         </a:rPr>
-                        <a:t>2.1 ÷ 1.4</a:t>
+                        <a:t>2,1 ÷ 1,4</a:t>
                       </a:r>
                     </a:p>
                   </a:txBody>
@@ -10956,7 +10956,7 @@
                           </a:solidFill>
                           <a:latin typeface="Bahnschrift" panose="020B0502040204020203" pitchFamily="34" charset="0"/>
                         </a:rPr>
-                        <a:t>1.4 × 0.7</a:t>
+                        <a:t>1,4 × 0,7</a:t>
                       </a:r>
                     </a:p>
                   </a:txBody>
@@ -11023,7 +11023,7 @@
                           </a:solidFill>
                           <a:latin typeface="Bahnschrift" panose="020B0502040204020203" pitchFamily="34" charset="0"/>
                         </a:rPr>
-                        <a:t>4.2 ÷ 2</a:t>
+                        <a:t>4,2 ÷ 2</a:t>
                       </a:r>
                     </a:p>
                   </a:txBody>
@@ -11481,7 +11481,7 @@
                           <a:ea typeface="+mn-ea"/>
                           <a:cs typeface="+mn-cs"/>
                         </a:rPr>
-                        <a:t>1.76</a:t>
+                        <a:t>1,76</a:t>
                       </a:r>
                     </a:p>
                   </a:txBody>
@@ -11564,7 +11564,7 @@
                           <a:ea typeface="+mn-ea"/>
                           <a:cs typeface="+mn-cs"/>
                         </a:rPr>
-                        <a:t>0.5</a:t>
+                        <a:t>0,5</a:t>
                       </a:r>
                     </a:p>
                   </a:txBody>
@@ -11730,7 +11730,7 @@
                           <a:ea typeface="+mn-ea"/>
                           <a:cs typeface="+mn-cs"/>
                         </a:rPr>
-                        <a:t>0.3</a:t>
+                        <a:t>0,3</a:t>
                       </a:r>
                     </a:p>
                   </a:txBody>
@@ -11813,7 +11813,7 @@
                           <a:ea typeface="+mn-ea"/>
                           <a:cs typeface="+mn-cs"/>
                         </a:rPr>
-                        <a:t>0.6</a:t>
+                        <a:t>0,6</a:t>
                       </a:r>
                     </a:p>
                   </a:txBody>
@@ -11986,7 +11986,7 @@
                           <a:ea typeface="+mn-ea"/>
                           <a:cs typeface="+mn-cs"/>
                         </a:rPr>
-                        <a:t>3.72</a:t>
+                        <a:t>3,72</a:t>
                       </a:r>
                     </a:p>
                   </a:txBody>
@@ -12069,7 +12069,7 @@
                           <a:ea typeface="+mn-ea"/>
                           <a:cs typeface="+mn-cs"/>
                         </a:rPr>
-                        <a:t>2.1</a:t>
+                        <a:t>2,1</a:t>
                       </a:r>
                     </a:p>
                   </a:txBody>
@@ -12152,7 +12152,7 @@
                           <a:ea typeface="+mn-ea"/>
                           <a:cs typeface="+mn-cs"/>
                         </a:rPr>
-                        <a:t>1.5</a:t>
+                        <a:t>1,5</a:t>
                       </a:r>
                     </a:p>
                   </a:txBody>
@@ -12325,7 +12325,7 @@
                           <a:ea typeface="+mn-ea"/>
                           <a:cs typeface="+mn-cs"/>
                         </a:rPr>
-                        <a:t>0.8</a:t>
+                        <a:t>0,8</a:t>
                       </a:r>
                     </a:p>
                   </a:txBody>
@@ -12408,7 +12408,7 @@
                           <a:ea typeface="+mn-ea"/>
                           <a:cs typeface="+mn-cs"/>
                         </a:rPr>
-                        <a:t>0.1</a:t>
+                        <a:t>0,1</a:t>
                       </a:r>
                     </a:p>
                   </a:txBody>
@@ -12491,7 +12491,7 @@
                           <a:ea typeface="+mn-ea"/>
                           <a:cs typeface="+mn-cs"/>
                         </a:rPr>
-                        <a:t>0.7</a:t>
+                        <a:t>0,7</a:t>
                       </a:r>
                     </a:p>
                   </a:txBody>
@@ -12574,7 +12574,7 @@
                           <a:ea typeface="+mn-ea"/>
                           <a:cs typeface="+mn-cs"/>
                         </a:rPr>
-                        <a:t>12.4</a:t>
+                        <a:t>12,4</a:t>
                       </a:r>
                     </a:p>
                   </a:txBody>
@@ -12657,7 +12657,7 @@
                           <a:ea typeface="+mn-ea"/>
                           <a:cs typeface="+mn-cs"/>
                         </a:rPr>
-                        <a:t>7.4</a:t>
+                        <a:t>7,4</a:t>
                       </a:r>
                     </a:p>
                   </a:txBody>
@@ -12830,7 +12830,7 @@
                           <a:ea typeface="+mn-ea"/>
                           <a:cs typeface="+mn-cs"/>
                         </a:rPr>
-                        <a:t>1.3</a:t>
+                        <a:t>1,3</a:t>
                       </a:r>
                     </a:p>
                   </a:txBody>
@@ -12996,7 +12996,7 @@
                           <a:ea typeface="+mn-ea"/>
                           <a:cs typeface="+mn-cs"/>
                         </a:rPr>
-                        <a:t>3.6</a:t>
+                        <a:t>3,6</a:t>
                       </a:r>
                     </a:p>
                   </a:txBody>
@@ -13169,7 +13169,7 @@
                           <a:ea typeface="+mn-ea"/>
                           <a:cs typeface="+mn-cs"/>
                         </a:rPr>
-                        <a:t>6.3</a:t>
+                        <a:t>6,3</a:t>
                       </a:r>
                     </a:p>
                   </a:txBody>
@@ -13252,7 +13252,7 @@
                           <a:ea typeface="+mn-ea"/>
                           <a:cs typeface="+mn-cs"/>
                         </a:rPr>
-                        <a:t>1.75</a:t>
+                        <a:t>1,75</a:t>
                       </a:r>
                     </a:p>
                   </a:txBody>
@@ -13335,7 +13335,7 @@
                           <a:ea typeface="+mn-ea"/>
                           <a:cs typeface="+mn-cs"/>
                         </a:rPr>
-                        <a:t>9.12</a:t>
+                        <a:t>9,12</a:t>
                       </a:r>
                     </a:p>
                   </a:txBody>
@@ -13418,7 +13418,7 @@
                           <a:ea typeface="+mn-ea"/>
                           <a:cs typeface="+mn-cs"/>
                         </a:rPr>
-                        <a:t>2.5</a:t>
+                        <a:t>2,5</a:t>
                       </a:r>
                     </a:p>
                   </a:txBody>
@@ -13501,7 +13501,7 @@
                           <a:ea typeface="+mn-ea"/>
                           <a:cs typeface="+mn-cs"/>
                         </a:rPr>
-                        <a:t>0.98</a:t>
+                        <a:t>0,98</a:t>
                       </a:r>
                     </a:p>
                   </a:txBody>
@@ -13632,7 +13632,7 @@
                           </a:solidFill>
                           <a:latin typeface="Bahnschrift" panose="020B0502040204020203" pitchFamily="34" charset="0"/>
                         </a:rPr>
-                        <a:t>1.2 × 3.1</a:t>
+                        <a:t>1,2 × 3,1</a:t>
                       </a:r>
                     </a:p>
                   </a:txBody>
@@ -13699,7 +13699,7 @@
                           </a:solidFill>
                           <a:latin typeface="Bahnschrift" panose="020B0502040204020203" pitchFamily="34" charset="0"/>
                         </a:rPr>
-                        <a:t> 6.5 ÷ 5</a:t>
+                        <a:t> 6,5 ÷ 5</a:t>
                       </a:r>
                     </a:p>
                   </a:txBody>
@@ -13766,7 +13766,7 @@
                           </a:solidFill>
                           <a:latin typeface="Bahnschrift" panose="020B0502040204020203" pitchFamily="34" charset="0"/>
                         </a:rPr>
-                        <a:t>4 × 0.9</a:t>
+                        <a:t>4 × 0,9</a:t>
                       </a:r>
                     </a:p>
                   </a:txBody>
@@ -13833,7 +13833,7 @@
                           </a:solidFill>
                           <a:latin typeface="Bahnschrift" panose="020B0502040204020203" pitchFamily="34" charset="0"/>
                         </a:rPr>
-                        <a:t>4 ÷ 0.4</a:t>
+                        <a:t>4 ÷ 0,4</a:t>
                       </a:r>
                     </a:p>
                   </a:txBody>
@@ -13900,7 +13900,7 @@
                           </a:solidFill>
                           <a:latin typeface="Bahnschrift" panose="020B0502040204020203" pitchFamily="34" charset="0"/>
                         </a:rPr>
-                        <a:t>3 × 2.1</a:t>
+                        <a:t>3 × 2,1</a:t>
                       </a:r>
                     </a:p>
                   </a:txBody>
@@ -13974,7 +13974,7 @@
                           </a:solidFill>
                           <a:latin typeface="Bahnschrift" panose="020B0502040204020203" pitchFamily="34" charset="0"/>
                         </a:rPr>
-                        <a:t>2.4 ÷ 1.2</a:t>
+                        <a:t>2,4 ÷ 1,2</a:t>
                       </a:r>
                     </a:p>
                   </a:txBody>
@@ -14041,7 +14041,7 @@
                           </a:solidFill>
                           <a:latin typeface="Bahnschrift" panose="020B0502040204020203" pitchFamily="34" charset="0"/>
                         </a:rPr>
-                        <a:t>0.6 × 0.5</a:t>
+                        <a:t>0,6 × 0,5</a:t>
                       </a:r>
                     </a:p>
                   </a:txBody>
@@ -14108,7 +14108,7 @@
                           </a:solidFill>
                           <a:latin typeface="Bahnschrift" panose="020B0502040204020203" pitchFamily="34" charset="0"/>
                         </a:rPr>
-                        <a:t>0. 9 ÷ 1.5</a:t>
+                        <a:t>0. 9 ÷ 1,5</a:t>
                       </a:r>
                     </a:p>
                   </a:txBody>
@@ -14175,7 +14175,7 @@
                           </a:solidFill>
                           <a:latin typeface="Bahnschrift" panose="020B0502040204020203" pitchFamily="34" charset="0"/>
                         </a:rPr>
-                        <a:t>3.7 × 2</a:t>
+                        <a:t>3,7 × 2</a:t>
                       </a:r>
                     </a:p>
                   </a:txBody>
@@ -14242,7 +14242,7 @@
                           </a:solidFill>
                           <a:latin typeface="Bahnschrift" panose="020B0502040204020203" pitchFamily="34" charset="0"/>
                         </a:rPr>
-                        <a:t>2.8 ÷ 1.6</a:t>
+                        <a:t>2,8 ÷ 1,6</a:t>
                       </a:r>
                     </a:p>
                   </a:txBody>
@@ -14316,7 +14316,7 @@
                           </a:solidFill>
                           <a:latin typeface="Bahnschrift" panose="020B0502040204020203" pitchFamily="34" charset="0"/>
                         </a:rPr>
-                        <a:t>3. 8 × 2.4</a:t>
+                        <a:t>3. 8 × 2,4</a:t>
                       </a:r>
                     </a:p>
                   </a:txBody>
@@ -14383,7 +14383,7 @@
                           </a:solidFill>
                           <a:latin typeface="Bahnschrift" panose="020B0502040204020203" pitchFamily="34" charset="0"/>
                         </a:rPr>
-                        <a:t>2.8 ÷ 4</a:t>
+                        <a:t>2,8 ÷ 4</a:t>
                       </a:r>
                     </a:p>
                   </a:txBody>
@@ -14450,7 +14450,7 @@
                           </a:solidFill>
                           <a:latin typeface="Bahnschrift" panose="020B0502040204020203" pitchFamily="34" charset="0"/>
                         </a:rPr>
-                        <a:t> 1.1 × 1.6</a:t>
+                        <a:t> 1,1 × 1,6</a:t>
                       </a:r>
                     </a:p>
                   </a:txBody>
@@ -14517,7 +14517,7 @@
                           </a:solidFill>
                           <a:latin typeface="Bahnschrift" panose="020B0502040204020203" pitchFamily="34" charset="0"/>
                         </a:rPr>
-                        <a:t>5 ÷ 0.2</a:t>
+                        <a:t>5 ÷ 0,2</a:t>
                       </a:r>
                     </a:p>
                   </a:txBody>
@@ -14584,7 +14584,7 @@
                           </a:solidFill>
                           <a:latin typeface="Bahnschrift" panose="020B0502040204020203" pitchFamily="34" charset="0"/>
                         </a:rPr>
-                        <a:t>0.5 × 0.2</a:t>
+                        <a:t>0,5 × 0,2</a:t>
                       </a:r>
                     </a:p>
                   </a:txBody>
@@ -14658,7 +14658,7 @@
                           </a:solidFill>
                           <a:latin typeface="Bahnschrift" panose="020B0502040204020203" pitchFamily="34" charset="0"/>
                         </a:rPr>
-                        <a:t>7.2 ÷ 9</a:t>
+                        <a:t>7,2 ÷ 9</a:t>
                       </a:r>
                     </a:p>
                   </a:txBody>
@@ -14725,7 +14725,7 @@
                           </a:solidFill>
                           <a:latin typeface="Bahnschrift" panose="020B0502040204020203" pitchFamily="34" charset="0"/>
                         </a:rPr>
-                        <a:t>3.1 × 4</a:t>
+                        <a:t>3,1 × 4</a:t>
                       </a:r>
                     </a:p>
                   </a:txBody>
@@ -14792,7 +14792,7 @@
                           </a:solidFill>
                           <a:latin typeface="Bahnschrift" panose="020B0502040204020203" pitchFamily="34" charset="0"/>
                         </a:rPr>
-                        <a:t>2.1 ÷ 1.4</a:t>
+                        <a:t>2,1 ÷ 1,4</a:t>
                       </a:r>
                     </a:p>
                   </a:txBody>
@@ -14859,7 +14859,7 @@
                           </a:solidFill>
                           <a:latin typeface="Bahnschrift" panose="020B0502040204020203" pitchFamily="34" charset="0"/>
                         </a:rPr>
-                        <a:t>1.4 × 0.7</a:t>
+                        <a:t>1,4 × 0,7</a:t>
                       </a:r>
                     </a:p>
                   </a:txBody>
@@ -14926,7 +14926,7 @@
                           </a:solidFill>
                           <a:latin typeface="Bahnschrift" panose="020B0502040204020203" pitchFamily="34" charset="0"/>
                         </a:rPr>
-                        <a:t>4.2 ÷ 2</a:t>
+                        <a:t>4,2 ÷ 2</a:t>
                       </a:r>
                     </a:p>
                   </a:txBody>
@@ -15360,7 +15360,7 @@
                           <a:ea typeface="+mn-ea"/>
                           <a:cs typeface="+mn-cs"/>
                         </a:rPr>
-                        <a:t>1.76</a:t>
+                        <a:t>1,76</a:t>
                       </a:r>
                     </a:p>
                   </a:txBody>
@@ -15443,7 +15443,7 @@
                           <a:ea typeface="+mn-ea"/>
                           <a:cs typeface="+mn-cs"/>
                         </a:rPr>
-                        <a:t>0.5</a:t>
+                        <a:t>0,5</a:t>
                       </a:r>
                     </a:p>
                   </a:txBody>
@@ -15609,7 +15609,7 @@
                           <a:ea typeface="+mn-ea"/>
                           <a:cs typeface="+mn-cs"/>
                         </a:rPr>
-                        <a:t>0.3</a:t>
+                        <a:t>0,3</a:t>
                       </a:r>
                     </a:p>
                   </a:txBody>
@@ -15692,7 +15692,7 @@
                           <a:ea typeface="+mn-ea"/>
                           <a:cs typeface="+mn-cs"/>
                         </a:rPr>
-                        <a:t>0.6</a:t>
+                        <a:t>0,6</a:t>
                       </a:r>
                     </a:p>
                   </a:txBody>
@@ -15865,7 +15865,7 @@
                           <a:ea typeface="+mn-ea"/>
                           <a:cs typeface="+mn-cs"/>
                         </a:rPr>
-                        <a:t>3.72</a:t>
+                        <a:t>3,72</a:t>
                       </a:r>
                     </a:p>
                   </a:txBody>
@@ -15948,7 +15948,7 @@
                           <a:ea typeface="+mn-ea"/>
                           <a:cs typeface="+mn-cs"/>
                         </a:rPr>
-                        <a:t>2.1</a:t>
+                        <a:t>2,1</a:t>
                       </a:r>
                     </a:p>
                   </a:txBody>
@@ -16031,7 +16031,7 @@
                           <a:ea typeface="+mn-ea"/>
                           <a:cs typeface="+mn-cs"/>
                         </a:rPr>
-                        <a:t>1.5</a:t>
+                        <a:t>1,5</a:t>
                       </a:r>
                     </a:p>
                   </a:txBody>
@@ -16204,7 +16204,7 @@
                           <a:ea typeface="+mn-ea"/>
                           <a:cs typeface="+mn-cs"/>
                         </a:rPr>
-                        <a:t>0.8</a:t>
+                        <a:t>0,8</a:t>
                       </a:r>
                     </a:p>
                   </a:txBody>
@@ -16287,7 +16287,7 @@
                           <a:ea typeface="+mn-ea"/>
                           <a:cs typeface="+mn-cs"/>
                         </a:rPr>
-                        <a:t>0.1</a:t>
+                        <a:t>0,1</a:t>
                       </a:r>
                     </a:p>
                   </a:txBody>
@@ -16370,7 +16370,7 @@
                           <a:ea typeface="+mn-ea"/>
                           <a:cs typeface="+mn-cs"/>
                         </a:rPr>
-                        <a:t>0.7</a:t>
+                        <a:t>0,7</a:t>
                       </a:r>
                     </a:p>
                   </a:txBody>
@@ -16453,7 +16453,7 @@
                           <a:ea typeface="+mn-ea"/>
                           <a:cs typeface="+mn-cs"/>
                         </a:rPr>
-                        <a:t>12.4</a:t>
+                        <a:t>12,4</a:t>
                       </a:r>
                     </a:p>
                   </a:txBody>
@@ -16536,7 +16536,7 @@
                           <a:ea typeface="+mn-ea"/>
                           <a:cs typeface="+mn-cs"/>
                         </a:rPr>
-                        <a:t>7.4</a:t>
+                        <a:t>7,4</a:t>
                       </a:r>
                     </a:p>
                   </a:txBody>
@@ -16709,7 +16709,7 @@
                           <a:ea typeface="+mn-ea"/>
                           <a:cs typeface="+mn-cs"/>
                         </a:rPr>
-                        <a:t>1.3</a:t>
+                        <a:t>1,3</a:t>
                       </a:r>
                     </a:p>
                   </a:txBody>
@@ -16875,7 +16875,7 @@
                           <a:ea typeface="+mn-ea"/>
                           <a:cs typeface="+mn-cs"/>
                         </a:rPr>
-                        <a:t>3.6</a:t>
+                        <a:t>3,6</a:t>
                       </a:r>
                     </a:p>
                   </a:txBody>
@@ -17048,7 +17048,7 @@
                           <a:ea typeface="+mn-ea"/>
                           <a:cs typeface="+mn-cs"/>
                         </a:rPr>
-                        <a:t>6.3</a:t>
+                        <a:t>6,3</a:t>
                       </a:r>
                     </a:p>
                   </a:txBody>
@@ -17131,7 +17131,7 @@
                           <a:ea typeface="+mn-ea"/>
                           <a:cs typeface="+mn-cs"/>
                         </a:rPr>
-                        <a:t>1.75</a:t>
+                        <a:t>1,75</a:t>
                       </a:r>
                     </a:p>
                   </a:txBody>
@@ -17214,7 +17214,7 @@
                           <a:ea typeface="+mn-ea"/>
                           <a:cs typeface="+mn-cs"/>
                         </a:rPr>
-                        <a:t>9.12</a:t>
+                        <a:t>9,12</a:t>
                       </a:r>
                     </a:p>
                   </a:txBody>
@@ -17297,7 +17297,7 @@
                           <a:ea typeface="+mn-ea"/>
                           <a:cs typeface="+mn-cs"/>
                         </a:rPr>
-                        <a:t>2.5</a:t>
+                        <a:t>2,5</a:t>
                       </a:r>
                     </a:p>
                   </a:txBody>
@@ -17380,7 +17380,7 @@
                           <a:ea typeface="+mn-ea"/>
                           <a:cs typeface="+mn-cs"/>
                         </a:rPr>
-                        <a:t>0.98</a:t>
+                        <a:t>0,98</a:t>
                       </a:r>
                     </a:p>
                   </a:txBody>
@@ -17517,7 +17517,7 @@
                           </a:solidFill>
                           <a:latin typeface="Bahnschrift" panose="020B0502040204020203" pitchFamily="34" charset="0"/>
                         </a:rPr>
-                        <a:t>1.2 × 3.1</a:t>
+                        <a:t>1,2 × 3,1</a:t>
                       </a:r>
                     </a:p>
                   </a:txBody>
@@ -17584,7 +17584,7 @@
                           </a:solidFill>
                           <a:latin typeface="Bahnschrift" panose="020B0502040204020203" pitchFamily="34" charset="0"/>
                         </a:rPr>
-                        <a:t> 6.5 ÷ 5</a:t>
+                        <a:t> 6,5 ÷ 5</a:t>
                       </a:r>
                     </a:p>
                   </a:txBody>
@@ -17651,7 +17651,7 @@
                           </a:solidFill>
                           <a:latin typeface="Bahnschrift" panose="020B0502040204020203" pitchFamily="34" charset="0"/>
                         </a:rPr>
-                        <a:t>4 × 0.9</a:t>
+                        <a:t>4 × 0,9</a:t>
                       </a:r>
                     </a:p>
                   </a:txBody>
@@ -17718,7 +17718,7 @@
                           </a:solidFill>
                           <a:latin typeface="Bahnschrift" panose="020B0502040204020203" pitchFamily="34" charset="0"/>
                         </a:rPr>
-                        <a:t>4 ÷ 0.4</a:t>
+                        <a:t>4 ÷ 0,4</a:t>
                       </a:r>
                     </a:p>
                   </a:txBody>
@@ -17785,7 +17785,7 @@
                           </a:solidFill>
                           <a:latin typeface="Bahnschrift" panose="020B0502040204020203" pitchFamily="34" charset="0"/>
                         </a:rPr>
-                        <a:t>3 × 2.1</a:t>
+                        <a:t>3 × 2,1</a:t>
                       </a:r>
                     </a:p>
                   </a:txBody>
@@ -17859,7 +17859,7 @@
                           </a:solidFill>
                           <a:latin typeface="Bahnschrift" panose="020B0502040204020203" pitchFamily="34" charset="0"/>
                         </a:rPr>
-                        <a:t>2.4 ÷ 1.2</a:t>
+                        <a:t>2,4 ÷ 1,2</a:t>
                       </a:r>
                     </a:p>
                   </a:txBody>
@@ -17926,7 +17926,7 @@
                           </a:solidFill>
                           <a:latin typeface="Bahnschrift" panose="020B0502040204020203" pitchFamily="34" charset="0"/>
                         </a:rPr>
-                        <a:t>0.6 × 0.5</a:t>
+                        <a:t>0,6 × 0,5</a:t>
                       </a:r>
                     </a:p>
                   </a:txBody>
@@ -17993,7 +17993,7 @@
                           </a:solidFill>
                           <a:latin typeface="Bahnschrift" panose="020B0502040204020203" pitchFamily="34" charset="0"/>
                         </a:rPr>
-                        <a:t>0. 9 ÷ 1.5</a:t>
+                        <a:t>0. 9 ÷ 1,5</a:t>
                       </a:r>
                     </a:p>
                   </a:txBody>
@@ -18060,7 +18060,7 @@
                           </a:solidFill>
                           <a:latin typeface="Bahnschrift" panose="020B0502040204020203" pitchFamily="34" charset="0"/>
                         </a:rPr>
-                        <a:t>3.7 × 2</a:t>
+                        <a:t>3,7 × 2</a:t>
                       </a:r>
                     </a:p>
                   </a:txBody>
@@ -18127,7 +18127,7 @@
                           </a:solidFill>
                           <a:latin typeface="Bahnschrift" panose="020B0502040204020203" pitchFamily="34" charset="0"/>
                         </a:rPr>
-                        <a:t>2.8 ÷ 1.6</a:t>
+                        <a:t>2,8 ÷ 1,6</a:t>
                       </a:r>
                     </a:p>
                   </a:txBody>
@@ -18201,7 +18201,7 @@
                           </a:solidFill>
                           <a:latin typeface="Bahnschrift" panose="020B0502040204020203" pitchFamily="34" charset="0"/>
                         </a:rPr>
-                        <a:t>3. 8 × 2.4</a:t>
+                        <a:t>3. 8 × 2,4</a:t>
                       </a:r>
                     </a:p>
                   </a:txBody>
@@ -18268,7 +18268,7 @@
                           </a:solidFill>
                           <a:latin typeface="Bahnschrift" panose="020B0502040204020203" pitchFamily="34" charset="0"/>
                         </a:rPr>
-                        <a:t>2.8 ÷ 4</a:t>
+                        <a:t>2,8 ÷ 4</a:t>
                       </a:r>
                     </a:p>
                   </a:txBody>
@@ -18335,7 +18335,7 @@
                           </a:solidFill>
                           <a:latin typeface="Bahnschrift" panose="020B0502040204020203" pitchFamily="34" charset="0"/>
                         </a:rPr>
-                        <a:t> 1.1 × 1.6</a:t>
+                        <a:t> 1,1 × 1,6</a:t>
                       </a:r>
                     </a:p>
                   </a:txBody>
@@ -18402,7 +18402,7 @@
                           </a:solidFill>
                           <a:latin typeface="Bahnschrift" panose="020B0502040204020203" pitchFamily="34" charset="0"/>
                         </a:rPr>
-                        <a:t>5 ÷ 0.2</a:t>
+                        <a:t>5 ÷ 0,2</a:t>
                       </a:r>
                     </a:p>
                   </a:txBody>
@@ -18469,7 +18469,7 @@
                           </a:solidFill>
                           <a:latin typeface="Bahnschrift" panose="020B0502040204020203" pitchFamily="34" charset="0"/>
                         </a:rPr>
-                        <a:t>0.5 × 0.2</a:t>
+                        <a:t>0,5 × 0,2</a:t>
                       </a:r>
                     </a:p>
                   </a:txBody>
@@ -18543,7 +18543,7 @@
                           </a:solidFill>
                           <a:latin typeface="Bahnschrift" panose="020B0502040204020203" pitchFamily="34" charset="0"/>
                         </a:rPr>
-                        <a:t>7.2 ÷ 9</a:t>
+                        <a:t>7,2 ÷ 9</a:t>
                       </a:r>
                     </a:p>
                   </a:txBody>
@@ -18610,7 +18610,7 @@
                           </a:solidFill>
                           <a:latin typeface="Bahnschrift" panose="020B0502040204020203" pitchFamily="34" charset="0"/>
                         </a:rPr>
-                        <a:t>3.1 × 4</a:t>
+                        <a:t>3,1 × 4</a:t>
                       </a:r>
                     </a:p>
                   </a:txBody>
@@ -18677,7 +18677,7 @@
                           </a:solidFill>
                           <a:latin typeface="Bahnschrift" panose="020B0502040204020203" pitchFamily="34" charset="0"/>
                         </a:rPr>
-                        <a:t>2.1 ÷ 1.4</a:t>
+                        <a:t>2,1 ÷ 1,4</a:t>
                       </a:r>
                     </a:p>
                   </a:txBody>
@@ -18744,7 +18744,7 @@
                           </a:solidFill>
                           <a:latin typeface="Bahnschrift" panose="020B0502040204020203" pitchFamily="34" charset="0"/>
                         </a:rPr>
-                        <a:t>1.4 × 0.7</a:t>
+                        <a:t>1,4 × 0,7</a:t>
                       </a:r>
                     </a:p>
                   </a:txBody>
@@ -18811,7 +18811,7 @@
                           </a:solidFill>
                           <a:latin typeface="Bahnschrift" panose="020B0502040204020203" pitchFamily="34" charset="0"/>
                         </a:rPr>
-                        <a:t>4.2 ÷ 2</a:t>
+                        <a:t>4,2 ÷ 2</a:t>
                       </a:r>
                     </a:p>
                   </a:txBody>
@@ -19371,7 +19371,7 @@
                           <a:ea typeface="+mn-ea"/>
                           <a:cs typeface="+mn-cs"/>
                         </a:rPr>
-                        <a:t>1.76</a:t>
+                        <a:t>1,76</a:t>
                       </a:r>
                     </a:p>
                   </a:txBody>
@@ -19454,7 +19454,7 @@
                           <a:ea typeface="+mn-ea"/>
                           <a:cs typeface="+mn-cs"/>
                         </a:rPr>
-                        <a:t>0.5</a:t>
+                        <a:t>0,5</a:t>
                       </a:r>
                     </a:p>
                   </a:txBody>
@@ -19623,7 +19623,7 @@
                           <a:ea typeface="+mn-ea"/>
                           <a:cs typeface="+mn-cs"/>
                         </a:rPr>
-                        <a:t>0.3</a:t>
+                        <a:t>0,3</a:t>
                       </a:r>
                     </a:p>
                   </a:txBody>
@@ -19706,7 +19706,7 @@
                           <a:ea typeface="+mn-ea"/>
                           <a:cs typeface="+mn-cs"/>
                         </a:rPr>
-                        <a:t>0.6</a:t>
+                        <a:t>0,6</a:t>
                       </a:r>
                     </a:p>
                   </a:txBody>
@@ -19882,7 +19882,7 @@
                           <a:ea typeface="+mn-ea"/>
                           <a:cs typeface="+mn-cs"/>
                         </a:rPr>
-                        <a:t>3.72</a:t>
+                        <a:t>3,72</a:t>
                       </a:r>
                     </a:p>
                   </a:txBody>
@@ -19965,7 +19965,7 @@
                           <a:ea typeface="+mn-ea"/>
                           <a:cs typeface="+mn-cs"/>
                         </a:rPr>
-                        <a:t>2.1</a:t>
+                        <a:t>2,1</a:t>
                       </a:r>
                     </a:p>
                   </a:txBody>
@@ -20048,7 +20048,7 @@
                           <a:ea typeface="+mn-ea"/>
                           <a:cs typeface="+mn-cs"/>
                         </a:rPr>
-                        <a:t>1.5</a:t>
+                        <a:t>1,5</a:t>
                       </a:r>
                     </a:p>
                   </a:txBody>
@@ -20224,7 +20224,7 @@
                           <a:ea typeface="+mn-ea"/>
                           <a:cs typeface="+mn-cs"/>
                         </a:rPr>
-                        <a:t>0.8</a:t>
+                        <a:t>0,8</a:t>
                       </a:r>
                     </a:p>
                   </a:txBody>
@@ -20307,7 +20307,7 @@
                           <a:ea typeface="+mn-ea"/>
                           <a:cs typeface="+mn-cs"/>
                         </a:rPr>
-                        <a:t>0.1</a:t>
+                        <a:t>0,1</a:t>
                       </a:r>
                     </a:p>
                   </a:txBody>
@@ -20390,7 +20390,7 @@
                           <a:ea typeface="+mn-ea"/>
                           <a:cs typeface="+mn-cs"/>
                         </a:rPr>
-                        <a:t>0.7</a:t>
+                        <a:t>0,7</a:t>
                       </a:r>
                     </a:p>
                   </a:txBody>
@@ -20473,7 +20473,7 @@
                           <a:ea typeface="+mn-ea"/>
                           <a:cs typeface="+mn-cs"/>
                         </a:rPr>
-                        <a:t>12.4</a:t>
+                        <a:t>12,4</a:t>
                       </a:r>
                     </a:p>
                   </a:txBody>
@@ -20556,7 +20556,7 @@
                           <a:ea typeface="+mn-ea"/>
                           <a:cs typeface="+mn-cs"/>
                         </a:rPr>
-                        <a:t>7.4</a:t>
+                        <a:t>7,4</a:t>
                       </a:r>
                     </a:p>
                   </a:txBody>
@@ -20732,7 +20732,7 @@
                           <a:ea typeface="+mn-ea"/>
                           <a:cs typeface="+mn-cs"/>
                         </a:rPr>
-                        <a:t>1.3</a:t>
+                        <a:t>1,3</a:t>
                       </a:r>
                     </a:p>
                   </a:txBody>
@@ -20898,7 +20898,7 @@
                           <a:ea typeface="+mn-ea"/>
                           <a:cs typeface="+mn-cs"/>
                         </a:rPr>
-                        <a:t>3.6</a:t>
+                        <a:t>3,6</a:t>
                       </a:r>
                     </a:p>
                   </a:txBody>
@@ -21071,7 +21071,7 @@
                           <a:ea typeface="+mn-ea"/>
                           <a:cs typeface="+mn-cs"/>
                         </a:rPr>
-                        <a:t>6.3</a:t>
+                        <a:t>6,3</a:t>
                       </a:r>
                     </a:p>
                   </a:txBody>
@@ -21154,7 +21154,7 @@
                           <a:ea typeface="+mn-ea"/>
                           <a:cs typeface="+mn-cs"/>
                         </a:rPr>
-                        <a:t>1.75</a:t>
+                        <a:t>1,75</a:t>
                       </a:r>
                     </a:p>
                   </a:txBody>
@@ -21237,7 +21237,7 @@
                           <a:ea typeface="+mn-ea"/>
                           <a:cs typeface="+mn-cs"/>
                         </a:rPr>
-                        <a:t>9.12</a:t>
+                        <a:t>9,12</a:t>
                       </a:r>
                     </a:p>
                   </a:txBody>
@@ -21320,7 +21320,7 @@
                           <a:ea typeface="+mn-ea"/>
                           <a:cs typeface="+mn-cs"/>
                         </a:rPr>
-                        <a:t>2.5</a:t>
+                        <a:t>2,5</a:t>
                       </a:r>
                     </a:p>
                   </a:txBody>
@@ -21406,7 +21406,7 @@
                           <a:ea typeface="+mn-ea"/>
                           <a:cs typeface="+mn-cs"/>
                         </a:rPr>
-                        <a:t>0.98</a:t>
+                        <a:t>0,98</a:t>
                       </a:r>
                     </a:p>
                   </a:txBody>
@@ -21543,7 +21543,7 @@
                           </a:solidFill>
                           <a:latin typeface="Bahnschrift" panose="020B0502040204020203" pitchFamily="34" charset="0"/>
                         </a:rPr>
-                        <a:t>1.2 × 3.1</a:t>
+                        <a:t>1,2 × 3,1</a:t>
                       </a:r>
                     </a:p>
                   </a:txBody>
@@ -21610,7 +21610,7 @@
                           </a:solidFill>
                           <a:latin typeface="Bahnschrift" panose="020B0502040204020203" pitchFamily="34" charset="0"/>
                         </a:rPr>
-                        <a:t> 6.5 ÷ 5</a:t>
+                        <a:t> 6,5 ÷ 5</a:t>
                       </a:r>
                     </a:p>
                   </a:txBody>
@@ -21677,7 +21677,7 @@
                           </a:solidFill>
                           <a:latin typeface="Bahnschrift" panose="020B0502040204020203" pitchFamily="34" charset="0"/>
                         </a:rPr>
-                        <a:t>4 × 0.9</a:t>
+                        <a:t>4 × 0,9</a:t>
                       </a:r>
                     </a:p>
                   </a:txBody>
@@ -21744,7 +21744,7 @@
                           </a:solidFill>
                           <a:latin typeface="Bahnschrift" panose="020B0502040204020203" pitchFamily="34" charset="0"/>
                         </a:rPr>
-                        <a:t>4 ÷ 0.4</a:t>
+                        <a:t>4 ÷ 0,4</a:t>
                       </a:r>
                     </a:p>
                   </a:txBody>
@@ -21811,7 +21811,7 @@
                           </a:solidFill>
                           <a:latin typeface="Bahnschrift" panose="020B0502040204020203" pitchFamily="34" charset="0"/>
                         </a:rPr>
-                        <a:t>3 × 2.1</a:t>
+                        <a:t>3 × 2,1</a:t>
                       </a:r>
                     </a:p>
                   </a:txBody>
@@ -21885,7 +21885,7 @@
                           </a:solidFill>
                           <a:latin typeface="Bahnschrift" panose="020B0502040204020203" pitchFamily="34" charset="0"/>
                         </a:rPr>
-                        <a:t>2.4 ÷ 1.2</a:t>
+                        <a:t>2,4 ÷ 1,2</a:t>
                       </a:r>
                     </a:p>
                   </a:txBody>
@@ -21952,7 +21952,7 @@
                           </a:solidFill>
                           <a:latin typeface="Bahnschrift" panose="020B0502040204020203" pitchFamily="34" charset="0"/>
                         </a:rPr>
-                        <a:t>0.6 × 0.5</a:t>
+                        <a:t>0,6 × 0,5</a:t>
                       </a:r>
                     </a:p>
                   </a:txBody>
@@ -22019,7 +22019,7 @@
                           </a:solidFill>
                           <a:latin typeface="Bahnschrift" panose="020B0502040204020203" pitchFamily="34" charset="0"/>
                         </a:rPr>
-                        <a:t>0. 9 ÷ 1.5</a:t>
+                        <a:t>0. 9 ÷ 1,5</a:t>
                       </a:r>
                     </a:p>
                   </a:txBody>
@@ -22086,7 +22086,7 @@
                           </a:solidFill>
                           <a:latin typeface="Bahnschrift" panose="020B0502040204020203" pitchFamily="34" charset="0"/>
                         </a:rPr>
-                        <a:t>3.7 × 2</a:t>
+                        <a:t>3,7 × 2</a:t>
                       </a:r>
                     </a:p>
                   </a:txBody>
@@ -22153,7 +22153,7 @@
                           </a:solidFill>
                           <a:latin typeface="Bahnschrift" panose="020B0502040204020203" pitchFamily="34" charset="0"/>
                         </a:rPr>
-                        <a:t>2.8 ÷ 1.6</a:t>
+                        <a:t>2,8 ÷ 1,6</a:t>
                       </a:r>
                     </a:p>
                   </a:txBody>
@@ -22227,7 +22227,7 @@
                           </a:solidFill>
                           <a:latin typeface="Bahnschrift" panose="020B0502040204020203" pitchFamily="34" charset="0"/>
                         </a:rPr>
-                        <a:t>3. 8 × 2.4</a:t>
+                        <a:t>3. 8 × 2,4</a:t>
                       </a:r>
                     </a:p>
                   </a:txBody>
@@ -22294,7 +22294,7 @@
                           </a:solidFill>
                           <a:latin typeface="Bahnschrift" panose="020B0502040204020203" pitchFamily="34" charset="0"/>
                         </a:rPr>
-                        <a:t>2.8 ÷ 4</a:t>
+                        <a:t>2,8 ÷ 4</a:t>
                       </a:r>
                     </a:p>
                   </a:txBody>
@@ -22361,7 +22361,7 @@
                           </a:solidFill>
                           <a:latin typeface="Bahnschrift" panose="020B0502040204020203" pitchFamily="34" charset="0"/>
                         </a:rPr>
-                        <a:t> 1.1 × 1.6</a:t>
+                        <a:t> 1,1 × 1,6</a:t>
                       </a:r>
                     </a:p>
                   </a:txBody>
@@ -22428,7 +22428,7 @@
                           </a:solidFill>
                           <a:latin typeface="Bahnschrift" panose="020B0502040204020203" pitchFamily="34" charset="0"/>
                         </a:rPr>
-                        <a:t>5 ÷ 0.2</a:t>
+                        <a:t>5 ÷ 0,2</a:t>
                       </a:r>
                     </a:p>
                   </a:txBody>
@@ -22495,7 +22495,7 @@
                           </a:solidFill>
                           <a:latin typeface="Bahnschrift" panose="020B0502040204020203" pitchFamily="34" charset="0"/>
                         </a:rPr>
-                        <a:t>0.5 × 0.2</a:t>
+                        <a:t>0,5 × 0,2</a:t>
                       </a:r>
                     </a:p>
                   </a:txBody>
@@ -22569,7 +22569,7 @@
                           </a:solidFill>
                           <a:latin typeface="Bahnschrift" panose="020B0502040204020203" pitchFamily="34" charset="0"/>
                         </a:rPr>
-                        <a:t>7.2 ÷ 9</a:t>
+                        <a:t>7,2 ÷ 9</a:t>
                       </a:r>
                     </a:p>
                   </a:txBody>
@@ -22636,7 +22636,7 @@
                           </a:solidFill>
                           <a:latin typeface="Bahnschrift" panose="020B0502040204020203" pitchFamily="34" charset="0"/>
                         </a:rPr>
-                        <a:t>3.1 × 4</a:t>
+                        <a:t>3,1 × 4</a:t>
                       </a:r>
                     </a:p>
                   </a:txBody>
@@ -22703,7 +22703,7 @@
                           </a:solidFill>
                           <a:latin typeface="Bahnschrift" panose="020B0502040204020203" pitchFamily="34" charset="0"/>
                         </a:rPr>
-                        <a:t>2.1 ÷ 1.4</a:t>
+                        <a:t>2,1 ÷ 1,4</a:t>
                       </a:r>
                     </a:p>
                   </a:txBody>
@@ -22770,7 +22770,7 @@
                           </a:solidFill>
                           <a:latin typeface="Bahnschrift" panose="020B0502040204020203" pitchFamily="34" charset="0"/>
                         </a:rPr>
-                        <a:t>1.4 × 0.7</a:t>
+                        <a:t>1,4 × 0,7</a:t>
                       </a:r>
                     </a:p>
                   </a:txBody>
@@ -22837,7 +22837,7 @@
                           </a:solidFill>
                           <a:latin typeface="Bahnschrift" panose="020B0502040204020203" pitchFamily="34" charset="0"/>
                         </a:rPr>
-                        <a:t>4.2 ÷ 2</a:t>
+                        <a:t>4,2 ÷ 2</a:t>
                       </a:r>
                     </a:p>
                   </a:txBody>
